--- a/PPT/MachineLearning14-KNN.pptx
+++ b/PPT/MachineLearning14-KNN.pptx
@@ -5,10 +5,10 @@
     <p:sldMasterId id="2147483653" r:id="rId1"/>
   </p:sldMasterIdLst>
   <p:notesMasterIdLst>
-    <p:notesMasterId r:id="rId15"/>
+    <p:notesMasterId r:id="rId28"/>
   </p:notesMasterIdLst>
   <p:handoutMasterIdLst>
-    <p:handoutMasterId r:id="rId16"/>
+    <p:handoutMasterId r:id="rId29"/>
   </p:handoutMasterIdLst>
   <p:sldIdLst>
     <p:sldId id="264" r:id="rId2"/>
@@ -24,6 +24,19 @@
     <p:sldId id="276" r:id="rId12"/>
     <p:sldId id="277" r:id="rId13"/>
     <p:sldId id="281" r:id="rId14"/>
+    <p:sldId id="300" r:id="rId15"/>
+    <p:sldId id="301" r:id="rId16"/>
+    <p:sldId id="302" r:id="rId17"/>
+    <p:sldId id="303" r:id="rId18"/>
+    <p:sldId id="304" r:id="rId19"/>
+    <p:sldId id="305" r:id="rId20"/>
+    <p:sldId id="270" r:id="rId21"/>
+    <p:sldId id="273" r:id="rId22"/>
+    <p:sldId id="306" r:id="rId23"/>
+    <p:sldId id="269" r:id="rId24"/>
+    <p:sldId id="274" r:id="rId25"/>
+    <p:sldId id="307" r:id="rId26"/>
+    <p:sldId id="310" r:id="rId27"/>
   </p:sldIdLst>
   <p:sldSz cx="9144000" cy="6858000" type="screen4x3"/>
   <p:notesSz cx="6648450" cy="9782175"/>
@@ -3782,13 +3795,6 @@
   <p:clrMapOvr>
     <a:masterClrMapping/>
   </p:clrMapOvr>
-  <p:timing>
-    <p:tnLst>
-      <p:par>
-        <p:cTn id="1" dur="indefinite" restart="never" nodeType="tmRoot"/>
-      </p:par>
-    </p:tnLst>
-  </p:timing>
 </p:sld>
 </file>
 
@@ -3930,13 +3936,6 @@
   <p:clrMapOvr>
     <a:masterClrMapping/>
   </p:clrMapOvr>
-  <p:timing>
-    <p:tnLst>
-      <p:par>
-        <p:cTn id="1" dur="indefinite" restart="never" nodeType="tmRoot"/>
-      </p:par>
-    </p:tnLst>
-  </p:timing>
 </p:sld>
 </file>
 
@@ -4213,13 +4212,6 @@
   <p:clrMapOvr>
     <a:masterClrMapping/>
   </p:clrMapOvr>
-  <p:timing>
-    <p:tnLst>
-      <p:par>
-        <p:cTn id="1" dur="indefinite" restart="never" nodeType="tmRoot"/>
-      </p:par>
-    </p:tnLst>
-  </p:timing>
 </p:sld>
 </file>
 
@@ -4349,13 +4341,6 @@
   <p:clrMapOvr>
     <a:masterClrMapping/>
   </p:clrMapOvr>
-  <p:timing>
-    <p:tnLst>
-      <p:par>
-        <p:cTn id="1" dur="indefinite" restart="never" nodeType="tmRoot"/>
-      </p:par>
-    </p:tnLst>
-  </p:timing>
 </p:sld>
 </file>
 
@@ -4484,13 +4469,1033 @@
   <p:clrMapOvr>
     <a:masterClrMapping/>
   </p:clrMapOvr>
-  <p:timing>
-    <p:tnLst>
-      <p:par>
-        <p:cTn id="1" dur="indefinite" restart="never" nodeType="tmRoot"/>
-      </p:par>
-    </p:tnLst>
-  </p:timing>
+</p:sld>
+</file>
+
+<file path=ppt/slides/slide14.xml><?xml version="1.0" encoding="utf-8"?>
+<p:sld xmlns:a="http://schemas.openxmlformats.org/drawingml/2006/main" xmlns:r="http://schemas.openxmlformats.org/officeDocument/2006/relationships" xmlns:p="http://schemas.openxmlformats.org/presentationml/2006/main">
+  <p:cSld>
+    <p:spTree>
+      <p:nvGrpSpPr>
+        <p:cNvPr id="1" name=""/>
+        <p:cNvGrpSpPr/>
+        <p:nvPr/>
+      </p:nvGrpSpPr>
+      <p:grpSpPr>
+        <a:xfrm>
+          <a:off x="0" y="0"/>
+          <a:ext cx="0" cy="0"/>
+          <a:chOff x="0" y="0"/>
+          <a:chExt cx="0" cy="0"/>
+        </a:xfrm>
+      </p:grpSpPr>
+      <p:sp>
+        <p:nvSpPr>
+          <p:cNvPr id="2" name="Titre 1">
+            <a:extLst>
+              <a:ext uri="{FF2B5EF4-FFF2-40B4-BE49-F238E27FC236}">
+                <a16:creationId xmlns:a16="http://schemas.microsoft.com/office/drawing/2014/main" id="{FDC57991-295F-676A-405D-131800F3CC7B}"/>
+              </a:ext>
+            </a:extLst>
+          </p:cNvPr>
+          <p:cNvSpPr>
+            <a:spLocks noGrp="1"/>
+          </p:cNvSpPr>
+          <p:nvPr>
+            <p:ph type="title"/>
+          </p:nvPr>
+        </p:nvSpPr>
+        <p:spPr/>
+        <p:txBody>
+          <a:bodyPr/>
+          <a:lstStyle/>
+          <a:p>
+            <a:r>
+              <a:rPr lang="fr-FR" dirty="0" err="1"/>
+              <a:t>Heart</a:t>
+            </a:r>
+            <a:r>
+              <a:rPr lang="fr-FR" dirty="0"/>
+              <a:t> </a:t>
+            </a:r>
+            <a:r>
+              <a:rPr lang="fr-FR" dirty="0" err="1"/>
+              <a:t>Disease</a:t>
+            </a:r>
+            <a:endParaRPr lang="fr-FR" dirty="0"/>
+          </a:p>
+        </p:txBody>
+      </p:sp>
+      <p:sp>
+        <p:nvSpPr>
+          <p:cNvPr id="3" name="Espace réservé du contenu 2">
+            <a:extLst>
+              <a:ext uri="{FF2B5EF4-FFF2-40B4-BE49-F238E27FC236}">
+                <a16:creationId xmlns:a16="http://schemas.microsoft.com/office/drawing/2014/main" id="{78BB788A-2A3D-4326-09EA-9DF3D9ED436E}"/>
+              </a:ext>
+            </a:extLst>
+          </p:cNvPr>
+          <p:cNvSpPr>
+            <a:spLocks noGrp="1"/>
+          </p:cNvSpPr>
+          <p:nvPr>
+            <p:ph idx="1"/>
+          </p:nvPr>
+        </p:nvSpPr>
+        <p:spPr/>
+        <p:txBody>
+          <a:bodyPr/>
+          <a:lstStyle/>
+          <a:p>
+            <a:r>
+              <a:rPr lang="fr-FR" dirty="0"/>
+              <a:t>Il s'agit d'un </a:t>
+            </a:r>
+            <a:r>
+              <a:rPr lang="fr-FR" dirty="0" err="1"/>
+              <a:t>dataset</a:t>
+            </a:r>
+            <a:r>
+              <a:rPr lang="fr-FR" dirty="0"/>
+              <a:t> de 11 </a:t>
+            </a:r>
+            <a:r>
+              <a:rPr lang="fr-FR" dirty="0" err="1"/>
+              <a:t>features</a:t>
+            </a:r>
+            <a:r>
+              <a:rPr lang="fr-FR" dirty="0"/>
+              <a:t> sur 260 data</a:t>
+            </a:r>
+          </a:p>
+          <a:p>
+            <a:pPr lvl="1"/>
+            <a:r>
+              <a:rPr lang="fr-FR" dirty="0" err="1"/>
+              <a:t>num</a:t>
+            </a:r>
+            <a:r>
+              <a:rPr lang="fr-FR" dirty="0"/>
+              <a:t> représente le diagnostique 1 = malade</a:t>
+            </a:r>
+          </a:p>
+          <a:p>
+            <a:r>
+              <a:rPr lang="fr-FR" dirty="0"/>
+              <a:t>Etude des poids</a:t>
+            </a:r>
+          </a:p>
+          <a:p>
+            <a:pPr lvl="1"/>
+            <a:r>
+              <a:rPr lang="fr-FR" dirty="0"/>
+              <a:t>x = 10 </a:t>
+            </a:r>
+            <a:r>
+              <a:rPr lang="fr-FR" dirty="0" err="1"/>
+              <a:t>features</a:t>
+            </a:r>
+            <a:endParaRPr lang="fr-FR" dirty="0"/>
+          </a:p>
+          <a:p>
+            <a:pPr lvl="1"/>
+            <a:r>
+              <a:rPr lang="fr-FR" dirty="0"/>
+              <a:t>y = 1 </a:t>
+            </a:r>
+            <a:r>
+              <a:rPr lang="fr-FR" dirty="0" err="1"/>
+              <a:t>feature</a:t>
+            </a:r>
+            <a:endParaRPr lang="fr-FR" dirty="0"/>
+          </a:p>
+          <a:p>
+            <a:pPr lvl="1"/>
+            <a:r>
+              <a:rPr lang="fr-FR" dirty="0" err="1"/>
+              <a:t>xtrain</a:t>
+            </a:r>
+            <a:r>
+              <a:rPr lang="fr-FR" dirty="0"/>
+              <a:t> = 260*0.8*10 = 2080 data =&gt; 6.3Ko en 32 bits</a:t>
+            </a:r>
+          </a:p>
+          <a:p>
+            <a:pPr lvl="1"/>
+            <a:endParaRPr lang="fr-FR" dirty="0"/>
+          </a:p>
+        </p:txBody>
+      </p:sp>
+      <p:pic>
+        <p:nvPicPr>
+          <p:cNvPr id="1026" name="Picture 2">
+            <a:extLst>
+              <a:ext uri="{FF2B5EF4-FFF2-40B4-BE49-F238E27FC236}">
+                <a16:creationId xmlns:a16="http://schemas.microsoft.com/office/drawing/2014/main" id="{EC7A4B40-DDBF-D07D-0ADB-3828339F53FA}"/>
+              </a:ext>
+            </a:extLst>
+          </p:cNvPr>
+          <p:cNvPicPr>
+            <a:picLocks noChangeAspect="1" noChangeArrowheads="1"/>
+          </p:cNvPicPr>
+          <p:nvPr/>
+        </p:nvPicPr>
+        <p:blipFill>
+          <a:blip r:embed="rId2">
+            <a:extLst>
+              <a:ext uri="{28A0092B-C50C-407E-A947-70E740481C1C}">
+                <a14:useLocalDpi xmlns:a14="http://schemas.microsoft.com/office/drawing/2010/main" val="0"/>
+              </a:ext>
+            </a:extLst>
+          </a:blip>
+          <a:srcRect/>
+          <a:stretch>
+            <a:fillRect/>
+          </a:stretch>
+        </p:blipFill>
+        <p:spPr bwMode="auto">
+          <a:xfrm>
+            <a:off x="3107" y="4981499"/>
+            <a:ext cx="9144000" cy="1925637"/>
+          </a:xfrm>
+          <a:prstGeom prst="rect">
+            <a:avLst/>
+          </a:prstGeom>
+          <a:noFill/>
+          <a:extLst>
+            <a:ext uri="{909E8E84-426E-40DD-AFC4-6F175D3DCCD1}">
+              <a14:hiddenFill xmlns:a14="http://schemas.microsoft.com/office/drawing/2010/main">
+                <a:solidFill>
+                  <a:srgbClr val="FFFFFF"/>
+                </a:solidFill>
+              </a14:hiddenFill>
+            </a:ext>
+          </a:extLst>
+        </p:spPr>
+      </p:pic>
+    </p:spTree>
+    <p:extLst>
+      <p:ext uri="{BB962C8B-B14F-4D97-AF65-F5344CB8AC3E}">
+        <p14:creationId xmlns:p14="http://schemas.microsoft.com/office/powerpoint/2010/main" val="687657812"/>
+      </p:ext>
+    </p:extLst>
+  </p:cSld>
+  <p:clrMapOvr>
+    <a:masterClrMapping/>
+  </p:clrMapOvr>
+</p:sld>
+</file>
+
+<file path=ppt/slides/slide15.xml><?xml version="1.0" encoding="utf-8"?>
+<p:sld xmlns:a="http://schemas.openxmlformats.org/drawingml/2006/main" xmlns:r="http://schemas.openxmlformats.org/officeDocument/2006/relationships" xmlns:p="http://schemas.openxmlformats.org/presentationml/2006/main">
+  <p:cSld>
+    <p:spTree>
+      <p:nvGrpSpPr>
+        <p:cNvPr id="1" name=""/>
+        <p:cNvGrpSpPr/>
+        <p:nvPr/>
+      </p:nvGrpSpPr>
+      <p:grpSpPr>
+        <a:xfrm>
+          <a:off x="0" y="0"/>
+          <a:ext cx="0" cy="0"/>
+          <a:chOff x="0" y="0"/>
+          <a:chExt cx="0" cy="0"/>
+        </a:xfrm>
+      </p:grpSpPr>
+      <p:sp>
+        <p:nvSpPr>
+          <p:cNvPr id="2" name="Titre 1">
+            <a:extLst>
+              <a:ext uri="{FF2B5EF4-FFF2-40B4-BE49-F238E27FC236}">
+                <a16:creationId xmlns:a16="http://schemas.microsoft.com/office/drawing/2014/main" id="{232A3D71-FD6B-386B-CD27-E1BF53FCB721}"/>
+              </a:ext>
+            </a:extLst>
+          </p:cNvPr>
+          <p:cNvSpPr>
+            <a:spLocks noGrp="1"/>
+          </p:cNvSpPr>
+          <p:nvPr>
+            <p:ph type="title"/>
+          </p:nvPr>
+        </p:nvSpPr>
+        <p:spPr/>
+        <p:txBody>
+          <a:bodyPr/>
+          <a:lstStyle/>
+          <a:p>
+            <a:r>
+              <a:rPr lang="fr-FR" dirty="0"/>
+              <a:t>Problématique de </a:t>
+            </a:r>
+            <a:r>
+              <a:rPr lang="fr-FR" dirty="0" err="1"/>
+              <a:t>kNN</a:t>
+            </a:r>
+            <a:endParaRPr lang="fr-FR" dirty="0"/>
+          </a:p>
+        </p:txBody>
+      </p:sp>
+      <p:sp>
+        <p:nvSpPr>
+          <p:cNvPr id="3" name="Espace réservé du contenu 2">
+            <a:extLst>
+              <a:ext uri="{FF2B5EF4-FFF2-40B4-BE49-F238E27FC236}">
+                <a16:creationId xmlns:a16="http://schemas.microsoft.com/office/drawing/2014/main" id="{59701372-25BC-4827-A1AC-77524D57B88E}"/>
+              </a:ext>
+            </a:extLst>
+          </p:cNvPr>
+          <p:cNvSpPr>
+            <a:spLocks noGrp="1"/>
+          </p:cNvSpPr>
+          <p:nvPr>
+            <p:ph idx="1"/>
+          </p:nvPr>
+        </p:nvSpPr>
+        <p:spPr/>
+        <p:txBody>
+          <a:bodyPr/>
+          <a:lstStyle/>
+          <a:p>
+            <a:r>
+              <a:rPr lang="fr-FR" dirty="0"/>
+              <a:t>Démo de </a:t>
+            </a:r>
+            <a:r>
+              <a:rPr lang="fr-FR" dirty="0" err="1"/>
+              <a:t>kNN</a:t>
+            </a:r>
+            <a:r>
+              <a:rPr lang="fr-FR" dirty="0"/>
+              <a:t> sur </a:t>
+            </a:r>
+            <a:r>
+              <a:rPr lang="fr-FR" dirty="0" err="1"/>
+              <a:t>heart-disease</a:t>
+            </a:r>
+            <a:endParaRPr lang="fr-FR" dirty="0"/>
+          </a:p>
+          <a:p>
+            <a:pPr lvl="1"/>
+            <a:r>
+              <a:rPr lang="fr-FR" dirty="0"/>
+              <a:t>Ca ne marche pas très bien</a:t>
+            </a:r>
+          </a:p>
+          <a:p>
+            <a:pPr lvl="1"/>
+            <a:r>
+              <a:rPr lang="fr-FR" dirty="0"/>
+              <a:t>Pourquoi</a:t>
+            </a:r>
+          </a:p>
+        </p:txBody>
+      </p:sp>
+      <p:pic>
+        <p:nvPicPr>
+          <p:cNvPr id="5" name="Image 4">
+            <a:extLst>
+              <a:ext uri="{FF2B5EF4-FFF2-40B4-BE49-F238E27FC236}">
+                <a16:creationId xmlns:a16="http://schemas.microsoft.com/office/drawing/2014/main" id="{58430CD5-A86A-449A-BB77-9F5581F5A9D9}"/>
+              </a:ext>
+            </a:extLst>
+          </p:cNvPr>
+          <p:cNvPicPr>
+            <a:picLocks noChangeAspect="1"/>
+          </p:cNvPicPr>
+          <p:nvPr/>
+        </p:nvPicPr>
+        <p:blipFill>
+          <a:blip r:embed="rId2"/>
+          <a:stretch>
+            <a:fillRect/>
+          </a:stretch>
+        </p:blipFill>
+        <p:spPr>
+          <a:xfrm>
+            <a:off x="2751833" y="2527844"/>
+            <a:ext cx="6392167" cy="4182059"/>
+          </a:xfrm>
+          <a:prstGeom prst="rect">
+            <a:avLst/>
+          </a:prstGeom>
+        </p:spPr>
+      </p:pic>
+    </p:spTree>
+    <p:extLst>
+      <p:ext uri="{BB962C8B-B14F-4D97-AF65-F5344CB8AC3E}">
+        <p14:creationId xmlns:p14="http://schemas.microsoft.com/office/powerpoint/2010/main" val="2887846053"/>
+      </p:ext>
+    </p:extLst>
+  </p:cSld>
+  <p:clrMapOvr>
+    <a:masterClrMapping/>
+  </p:clrMapOvr>
+</p:sld>
+</file>
+
+<file path=ppt/slides/slide16.xml><?xml version="1.0" encoding="utf-8"?>
+<p:sld xmlns:a="http://schemas.openxmlformats.org/drawingml/2006/main" xmlns:r="http://schemas.openxmlformats.org/officeDocument/2006/relationships" xmlns:p="http://schemas.openxmlformats.org/presentationml/2006/main">
+  <p:cSld>
+    <p:spTree>
+      <p:nvGrpSpPr>
+        <p:cNvPr id="1" name=""/>
+        <p:cNvGrpSpPr/>
+        <p:nvPr/>
+      </p:nvGrpSpPr>
+      <p:grpSpPr>
+        <a:xfrm>
+          <a:off x="0" y="0"/>
+          <a:ext cx="0" cy="0"/>
+          <a:chOff x="0" y="0"/>
+          <a:chExt cx="0" cy="0"/>
+        </a:xfrm>
+      </p:grpSpPr>
+      <p:sp>
+        <p:nvSpPr>
+          <p:cNvPr id="2" name="Titre 1">
+            <a:extLst>
+              <a:ext uri="{FF2B5EF4-FFF2-40B4-BE49-F238E27FC236}">
+                <a16:creationId xmlns:a16="http://schemas.microsoft.com/office/drawing/2014/main" id="{680F0183-F00F-B766-0F8F-D1DD1582F834}"/>
+              </a:ext>
+            </a:extLst>
+          </p:cNvPr>
+          <p:cNvSpPr>
+            <a:spLocks noGrp="1"/>
+          </p:cNvSpPr>
+          <p:nvPr>
+            <p:ph type="title"/>
+          </p:nvPr>
+        </p:nvSpPr>
+        <p:spPr/>
+        <p:txBody>
+          <a:bodyPr/>
+          <a:lstStyle/>
+          <a:p>
+            <a:r>
+              <a:rPr lang="fr-FR" dirty="0"/>
+              <a:t>Normalisation</a:t>
+            </a:r>
+          </a:p>
+        </p:txBody>
+      </p:sp>
+      <p:sp>
+        <p:nvSpPr>
+          <p:cNvPr id="3" name="Espace réservé du contenu 2">
+            <a:extLst>
+              <a:ext uri="{FF2B5EF4-FFF2-40B4-BE49-F238E27FC236}">
+                <a16:creationId xmlns:a16="http://schemas.microsoft.com/office/drawing/2014/main" id="{A81E71D4-0EEC-0214-FB84-A1F0738FA342}"/>
+              </a:ext>
+            </a:extLst>
+          </p:cNvPr>
+          <p:cNvSpPr>
+            <a:spLocks noGrp="1"/>
+          </p:cNvSpPr>
+          <p:nvPr>
+            <p:ph idx="1"/>
+          </p:nvPr>
+        </p:nvSpPr>
+        <p:spPr/>
+        <p:txBody>
+          <a:bodyPr/>
+          <a:lstStyle/>
+          <a:p>
+            <a:r>
+              <a:rPr lang="fr-FR" dirty="0"/>
+              <a:t>pour mesurer des distances euclidiennes il faut comparer ce qui est comparable</a:t>
+            </a:r>
+          </a:p>
+          <a:p>
+            <a:pPr lvl="1"/>
+            <a:r>
+              <a:rPr lang="fr-FR" dirty="0"/>
+              <a:t>Tout doit être sur le même facture d'échelle</a:t>
+            </a:r>
+          </a:p>
+          <a:p>
+            <a:pPr lvl="1"/>
+            <a:r>
+              <a:rPr lang="fr-FR" dirty="0"/>
+              <a:t>Il faut donc normaliser (</a:t>
+            </a:r>
+            <a:r>
+              <a:rPr lang="fr-FR" dirty="0" err="1"/>
+              <a:t>scaling</a:t>
+            </a:r>
+            <a:r>
+              <a:rPr lang="fr-FR" dirty="0"/>
+              <a:t>) les données</a:t>
+            </a:r>
+          </a:p>
+          <a:p>
+            <a:pPr lvl="1"/>
+            <a:r>
+              <a:rPr lang="en-US" dirty="0"/>
+              <a:t>import </a:t>
+            </a:r>
+            <a:r>
+              <a:rPr lang="en-US" dirty="0" err="1"/>
+              <a:t>sklearn.preprocessing</a:t>
+            </a:r>
+            <a:r>
+              <a:rPr lang="en-US" dirty="0"/>
+              <a:t> as pp</a:t>
+            </a:r>
+          </a:p>
+          <a:p>
+            <a:r>
+              <a:rPr lang="en-US" dirty="0"/>
+              <a:t>Le scaler fait </a:t>
+            </a:r>
+            <a:r>
+              <a:rPr lang="en-US" dirty="0" err="1"/>
+              <a:t>partie</a:t>
+            </a:r>
+            <a:r>
+              <a:rPr lang="en-US" dirty="0"/>
+              <a:t> du </a:t>
+            </a:r>
+            <a:r>
+              <a:rPr lang="en-US" dirty="0" err="1"/>
+              <a:t>modèle</a:t>
+            </a:r>
+            <a:endParaRPr lang="en-US" dirty="0"/>
+          </a:p>
+          <a:p>
+            <a:pPr lvl="1"/>
+            <a:r>
+              <a:rPr lang="en-US" dirty="0"/>
+              <a:t>Si un </a:t>
+            </a:r>
+            <a:r>
+              <a:rPr lang="en-US" dirty="0" err="1"/>
+              <a:t>modèle</a:t>
+            </a:r>
+            <a:r>
+              <a:rPr lang="en-US" dirty="0"/>
+              <a:t> </a:t>
+            </a:r>
+            <a:r>
+              <a:rPr lang="en-US" dirty="0" err="1"/>
+              <a:t>apprend</a:t>
+            </a:r>
+            <a:r>
+              <a:rPr lang="en-US" dirty="0"/>
+              <a:t> avec un scaler, la prediction doit utilizer des données </a:t>
+            </a:r>
+            <a:r>
+              <a:rPr lang="en-US" dirty="0" err="1"/>
+              <a:t>scalées</a:t>
+            </a:r>
+            <a:endParaRPr lang="en-US" dirty="0"/>
+          </a:p>
+          <a:p>
+            <a:pPr lvl="1"/>
+            <a:endParaRPr lang="fr-FR" dirty="0"/>
+          </a:p>
+          <a:p>
+            <a:pPr lvl="1"/>
+            <a:endParaRPr lang="fr-FR" dirty="0"/>
+          </a:p>
+          <a:p>
+            <a:pPr lvl="1"/>
+            <a:endParaRPr lang="fr-FR" dirty="0"/>
+          </a:p>
+        </p:txBody>
+      </p:sp>
+    </p:spTree>
+    <p:extLst>
+      <p:ext uri="{BB962C8B-B14F-4D97-AF65-F5344CB8AC3E}">
+        <p14:creationId xmlns:p14="http://schemas.microsoft.com/office/powerpoint/2010/main" val="681480761"/>
+      </p:ext>
+    </p:extLst>
+  </p:cSld>
+  <p:clrMapOvr>
+    <a:masterClrMapping/>
+  </p:clrMapOvr>
+</p:sld>
+</file>
+
+<file path=ppt/slides/slide17.xml><?xml version="1.0" encoding="utf-8"?>
+<p:sld xmlns:a="http://schemas.openxmlformats.org/drawingml/2006/main" xmlns:r="http://schemas.openxmlformats.org/officeDocument/2006/relationships" xmlns:p="http://schemas.openxmlformats.org/presentationml/2006/main">
+  <p:cSld>
+    <p:spTree>
+      <p:nvGrpSpPr>
+        <p:cNvPr id="1" name=""/>
+        <p:cNvGrpSpPr/>
+        <p:nvPr/>
+      </p:nvGrpSpPr>
+      <p:grpSpPr>
+        <a:xfrm>
+          <a:off x="0" y="0"/>
+          <a:ext cx="0" cy="0"/>
+          <a:chOff x="0" y="0"/>
+          <a:chExt cx="0" cy="0"/>
+        </a:xfrm>
+      </p:grpSpPr>
+      <p:sp>
+        <p:nvSpPr>
+          <p:cNvPr id="2" name="Titre 1">
+            <a:extLst>
+              <a:ext uri="{FF2B5EF4-FFF2-40B4-BE49-F238E27FC236}">
+                <a16:creationId xmlns:a16="http://schemas.microsoft.com/office/drawing/2014/main" id="{328E06FD-2B1C-C465-57E0-9A5FD644ACC9}"/>
+              </a:ext>
+            </a:extLst>
+          </p:cNvPr>
+          <p:cNvSpPr>
+            <a:spLocks noGrp="1"/>
+          </p:cNvSpPr>
+          <p:nvPr>
+            <p:ph type="title"/>
+          </p:nvPr>
+        </p:nvSpPr>
+        <p:spPr/>
+        <p:txBody>
+          <a:bodyPr/>
+          <a:lstStyle/>
+          <a:p>
+            <a:r>
+              <a:rPr lang="fr-FR" dirty="0" err="1"/>
+              <a:t>MinMaxScaler</a:t>
+            </a:r>
+            <a:endParaRPr lang="fr-FR" dirty="0"/>
+          </a:p>
+        </p:txBody>
+      </p:sp>
+      <p:sp>
+        <p:nvSpPr>
+          <p:cNvPr id="3" name="Espace réservé du contenu 2">
+            <a:extLst>
+              <a:ext uri="{FF2B5EF4-FFF2-40B4-BE49-F238E27FC236}">
+                <a16:creationId xmlns:a16="http://schemas.microsoft.com/office/drawing/2014/main" id="{CC8D862C-15A0-057B-CD86-C761091EB758}"/>
+              </a:ext>
+            </a:extLst>
+          </p:cNvPr>
+          <p:cNvSpPr>
+            <a:spLocks noGrp="1"/>
+          </p:cNvSpPr>
+          <p:nvPr>
+            <p:ph idx="1"/>
+          </p:nvPr>
+        </p:nvSpPr>
+        <p:spPr/>
+        <p:txBody>
+          <a:bodyPr/>
+          <a:lstStyle/>
+          <a:p>
+            <a:r>
+              <a:rPr lang="fr-FR" dirty="0"/>
+              <a:t>Pour chaque </a:t>
+            </a:r>
+            <a:r>
+              <a:rPr lang="fr-FR" dirty="0" err="1"/>
+              <a:t>feature</a:t>
+            </a:r>
+            <a:r>
+              <a:rPr lang="fr-FR" dirty="0"/>
+              <a:t> calculer le min et le max et normaliser sur [0..1]</a:t>
+            </a:r>
+          </a:p>
+          <a:p>
+            <a:r>
+              <a:rPr lang="fr-FR" dirty="0" err="1"/>
+              <a:t>scaler</a:t>
+            </a:r>
+            <a:r>
+              <a:rPr lang="fr-FR" dirty="0"/>
+              <a:t>(x) = (x – min) / (max – min)</a:t>
+            </a:r>
+          </a:p>
+          <a:p>
+            <a:r>
+              <a:rPr lang="fr-FR" dirty="0" err="1"/>
+              <a:t>Scaler</a:t>
+            </a:r>
+            <a:r>
+              <a:rPr lang="fr-FR" dirty="0"/>
+              <a:t> efficace</a:t>
+            </a:r>
+          </a:p>
+          <a:p>
+            <a:pPr lvl="1"/>
+            <a:r>
+              <a:rPr lang="fr-FR" dirty="0"/>
+              <a:t>Mauvaise gestion des </a:t>
+            </a:r>
+            <a:r>
+              <a:rPr lang="fr-FR" dirty="0" err="1"/>
+              <a:t>outfits</a:t>
+            </a:r>
+            <a:endParaRPr lang="fr-FR" dirty="0"/>
+          </a:p>
+          <a:p>
+            <a:r>
+              <a:rPr lang="fr-FR" dirty="0" err="1"/>
+              <a:t>scaler</a:t>
+            </a:r>
+            <a:r>
+              <a:rPr lang="fr-FR" dirty="0"/>
+              <a:t> = </a:t>
+            </a:r>
+            <a:r>
+              <a:rPr lang="fr-FR" dirty="0" err="1"/>
+              <a:t>pp.MinMaxScaler</a:t>
+            </a:r>
+            <a:r>
+              <a:rPr lang="fr-FR" dirty="0"/>
+              <a:t>()</a:t>
+            </a:r>
+          </a:p>
+          <a:p>
+            <a:r>
+              <a:rPr lang="fr-FR" dirty="0" err="1"/>
+              <a:t>scaler.fit</a:t>
+            </a:r>
+            <a:r>
+              <a:rPr lang="fr-FR" dirty="0"/>
+              <a:t>(</a:t>
+            </a:r>
+            <a:r>
+              <a:rPr lang="fr-FR" dirty="0" err="1"/>
+              <a:t>xtrain</a:t>
+            </a:r>
+            <a:r>
+              <a:rPr lang="fr-FR" dirty="0"/>
+              <a:t>)</a:t>
+            </a:r>
+          </a:p>
+          <a:p>
+            <a:r>
+              <a:rPr lang="fr-FR" dirty="0" err="1"/>
+              <a:t>xtrain</a:t>
+            </a:r>
+            <a:r>
+              <a:rPr lang="fr-FR" dirty="0"/>
+              <a:t> = </a:t>
+            </a:r>
+            <a:r>
+              <a:rPr lang="fr-FR" dirty="0" err="1"/>
+              <a:t>scaler.transform</a:t>
+            </a:r>
+            <a:r>
+              <a:rPr lang="fr-FR" dirty="0"/>
+              <a:t>(</a:t>
+            </a:r>
+            <a:r>
+              <a:rPr lang="fr-FR" dirty="0" err="1"/>
+              <a:t>xtrain</a:t>
+            </a:r>
+            <a:r>
+              <a:rPr lang="fr-FR" dirty="0"/>
+              <a:t>)</a:t>
+            </a:r>
+          </a:p>
+          <a:p>
+            <a:r>
+              <a:rPr lang="fr-FR" dirty="0" err="1"/>
+              <a:t>xtest</a:t>
+            </a:r>
+            <a:r>
+              <a:rPr lang="fr-FR" dirty="0"/>
+              <a:t> = </a:t>
+            </a:r>
+            <a:r>
+              <a:rPr lang="fr-FR" dirty="0" err="1"/>
+              <a:t>scaler.transform</a:t>
+            </a:r>
+            <a:r>
+              <a:rPr lang="fr-FR" dirty="0"/>
+              <a:t>(</a:t>
+            </a:r>
+            <a:r>
+              <a:rPr lang="fr-FR" dirty="0" err="1"/>
+              <a:t>xtest</a:t>
+            </a:r>
+            <a:r>
+              <a:rPr lang="fr-FR" dirty="0"/>
+              <a:t>)</a:t>
+            </a:r>
+          </a:p>
+        </p:txBody>
+      </p:sp>
+    </p:spTree>
+    <p:extLst>
+      <p:ext uri="{BB962C8B-B14F-4D97-AF65-F5344CB8AC3E}">
+        <p14:creationId xmlns:p14="http://schemas.microsoft.com/office/powerpoint/2010/main" val="3606303048"/>
+      </p:ext>
+    </p:extLst>
+  </p:cSld>
+  <p:clrMapOvr>
+    <a:masterClrMapping/>
+  </p:clrMapOvr>
+</p:sld>
+</file>
+
+<file path=ppt/slides/slide18.xml><?xml version="1.0" encoding="utf-8"?>
+<p:sld xmlns:a="http://schemas.openxmlformats.org/drawingml/2006/main" xmlns:r="http://schemas.openxmlformats.org/officeDocument/2006/relationships" xmlns:p="http://schemas.openxmlformats.org/presentationml/2006/main">
+  <p:cSld>
+    <p:spTree>
+      <p:nvGrpSpPr>
+        <p:cNvPr id="1" name=""/>
+        <p:cNvGrpSpPr/>
+        <p:nvPr/>
+      </p:nvGrpSpPr>
+      <p:grpSpPr>
+        <a:xfrm>
+          <a:off x="0" y="0"/>
+          <a:ext cx="0" cy="0"/>
+          <a:chOff x="0" y="0"/>
+          <a:chExt cx="0" cy="0"/>
+        </a:xfrm>
+      </p:grpSpPr>
+      <p:sp>
+        <p:nvSpPr>
+          <p:cNvPr id="2" name="Titre 1"/>
+          <p:cNvSpPr>
+            <a:spLocks noGrp="1"/>
+          </p:cNvSpPr>
+          <p:nvPr>
+            <p:ph type="title"/>
+          </p:nvPr>
+        </p:nvSpPr>
+        <p:spPr/>
+        <p:txBody>
+          <a:bodyPr/>
+          <a:lstStyle/>
+          <a:p>
+            <a:r>
+              <a:rPr lang="fr-FR" dirty="0"/>
+              <a:t>Loi normale</a:t>
+            </a:r>
+          </a:p>
+        </p:txBody>
+      </p:sp>
+      <p:sp>
+        <p:nvSpPr>
+          <p:cNvPr id="3" name="Espace réservé du contenu 2"/>
+          <p:cNvSpPr>
+            <a:spLocks noGrp="1"/>
+          </p:cNvSpPr>
+          <p:nvPr>
+            <p:ph idx="1"/>
+          </p:nvPr>
+        </p:nvSpPr>
+        <p:spPr/>
+        <p:txBody>
+          <a:bodyPr/>
+          <a:lstStyle/>
+          <a:p>
+            <a:r>
+              <a:rPr lang="fr-FR" dirty="0"/>
+              <a:t>Il est fréquent de considérer que les valeurs se répartissent selon une courbe de Gauss</a:t>
+            </a:r>
+          </a:p>
+          <a:p>
+            <a:pPr lvl="1"/>
+            <a:r>
+              <a:rPr lang="fr-FR" dirty="0"/>
+              <a:t>Dans le cas des sciences sociales, par exemple, la moyenne et l'écart type permettent de déterminer un intervalle dans lequel on trouve une majorité de la population</a:t>
+            </a:r>
+          </a:p>
+          <a:p>
+            <a:pPr lvl="1"/>
+            <a:endParaRPr lang="fr-FR" dirty="0"/>
+          </a:p>
+        </p:txBody>
+      </p:sp>
+      <p:pic>
+        <p:nvPicPr>
+          <p:cNvPr id="4098" name="Picture 2" descr="https://upload.wikimedia.org/wikipedia/commons/thumb/8/8c/Standard_deviation_diagram.svg/400px-Standard_deviation_diagram.svg.png"/>
+          <p:cNvPicPr>
+            <a:picLocks noChangeAspect="1" noChangeArrowheads="1"/>
+          </p:cNvPicPr>
+          <p:nvPr/>
+        </p:nvPicPr>
+        <p:blipFill>
+          <a:blip r:embed="rId2">
+            <a:extLst>
+              <a:ext uri="{28A0092B-C50C-407E-A947-70E740481C1C}">
+                <a14:useLocalDpi xmlns:a14="http://schemas.microsoft.com/office/drawing/2010/main" val="0"/>
+              </a:ext>
+            </a:extLst>
+          </a:blip>
+          <a:srcRect/>
+          <a:stretch>
+            <a:fillRect/>
+          </a:stretch>
+        </p:blipFill>
+        <p:spPr bwMode="auto">
+          <a:xfrm>
+            <a:off x="2339752" y="4221088"/>
+            <a:ext cx="3810000" cy="1905000"/>
+          </a:xfrm>
+          <a:prstGeom prst="rect">
+            <a:avLst/>
+          </a:prstGeom>
+          <a:noFill/>
+          <a:extLst>
+            <a:ext uri="{909E8E84-426E-40DD-AFC4-6F175D3DCCD1}">
+              <a14:hiddenFill xmlns:a14="http://schemas.microsoft.com/office/drawing/2010/main">
+                <a:solidFill>
+                  <a:srgbClr val="FFFFFF"/>
+                </a:solidFill>
+              </a14:hiddenFill>
+            </a:ext>
+          </a:extLst>
+        </p:spPr>
+      </p:pic>
+    </p:spTree>
+    <p:extLst>
+      <p:ext uri="{BB962C8B-B14F-4D97-AF65-F5344CB8AC3E}">
+        <p14:creationId xmlns:p14="http://schemas.microsoft.com/office/powerpoint/2010/main" val="3293432649"/>
+      </p:ext>
+    </p:extLst>
+  </p:cSld>
+  <p:clrMapOvr>
+    <a:masterClrMapping/>
+  </p:clrMapOvr>
+</p:sld>
+</file>
+
+<file path=ppt/slides/slide19.xml><?xml version="1.0" encoding="utf-8"?>
+<p:sld xmlns:a="http://schemas.openxmlformats.org/drawingml/2006/main" xmlns:r="http://schemas.openxmlformats.org/officeDocument/2006/relationships" xmlns:p="http://schemas.openxmlformats.org/presentationml/2006/main">
+  <p:cSld>
+    <p:spTree>
+      <p:nvGrpSpPr>
+        <p:cNvPr id="1" name=""/>
+        <p:cNvGrpSpPr/>
+        <p:nvPr/>
+      </p:nvGrpSpPr>
+      <p:grpSpPr>
+        <a:xfrm>
+          <a:off x="0" y="0"/>
+          <a:ext cx="0" cy="0"/>
+          <a:chOff x="0" y="0"/>
+          <a:chExt cx="0" cy="0"/>
+        </a:xfrm>
+      </p:grpSpPr>
+      <p:sp>
+        <p:nvSpPr>
+          <p:cNvPr id="2" name="Titre 1"/>
+          <p:cNvSpPr>
+            <a:spLocks noGrp="1"/>
+          </p:cNvSpPr>
+          <p:nvPr>
+            <p:ph type="title"/>
+          </p:nvPr>
+        </p:nvSpPr>
+        <p:spPr/>
+        <p:txBody>
+          <a:bodyPr/>
+          <a:lstStyle/>
+          <a:p>
+            <a:r>
+              <a:rPr lang="fr-FR" dirty="0"/>
+              <a:t>Ecart type</a:t>
+            </a:r>
+          </a:p>
+        </p:txBody>
+      </p:sp>
+      <p:sp>
+        <p:nvSpPr>
+          <p:cNvPr id="3" name="Espace réservé du contenu 2"/>
+          <p:cNvSpPr>
+            <a:spLocks noGrp="1"/>
+          </p:cNvSpPr>
+          <p:nvPr>
+            <p:ph idx="1"/>
+          </p:nvPr>
+        </p:nvSpPr>
+        <p:spPr/>
+        <p:txBody>
+          <a:bodyPr/>
+          <a:lstStyle/>
+          <a:p>
+            <a:r>
+              <a:rPr lang="fr-FR" dirty="0"/>
+              <a:t>Mesure la dispersion des variables</a:t>
+            </a:r>
+          </a:p>
+          <a:p>
+            <a:pPr lvl="1"/>
+            <a:r>
+              <a:rPr lang="fr-FR" dirty="0"/>
+              <a:t>Racine carrée de la variance</a:t>
+            </a:r>
+          </a:p>
+          <a:p>
+            <a:pPr lvl="1"/>
+            <a:r>
+              <a:rPr lang="fr-FR" dirty="0"/>
+              <a:t>Moyenne est écarts par rapport à une moyenne</a:t>
+            </a:r>
+          </a:p>
+          <a:p>
+            <a:pPr lvl="1"/>
+            <a:r>
+              <a:rPr lang="fr-FR" dirty="0"/>
+              <a:t>Souvent noté sigma</a:t>
+            </a:r>
+          </a:p>
+          <a:p>
+            <a:r>
+              <a:rPr lang="fr-FR" dirty="0"/>
+              <a:t>Voici 2 échantillons avec la même moyenne mais des écarts types différents</a:t>
+            </a:r>
+          </a:p>
+        </p:txBody>
+      </p:sp>
+      <p:pic>
+        <p:nvPicPr>
+          <p:cNvPr id="3074" name="Picture 2" descr="https://upload.wikimedia.org/wikipedia/commons/thumb/f/f9/Comparison_standard_deviations.svg/612px-Comparison_standard_deviations.svg.png"/>
+          <p:cNvPicPr>
+            <a:picLocks noChangeAspect="1" noChangeArrowheads="1"/>
+          </p:cNvPicPr>
+          <p:nvPr/>
+        </p:nvPicPr>
+        <p:blipFill>
+          <a:blip r:embed="rId2">
+            <a:extLst>
+              <a:ext uri="{28A0092B-C50C-407E-A947-70E740481C1C}">
+                <a14:useLocalDpi xmlns:a14="http://schemas.microsoft.com/office/drawing/2010/main" val="0"/>
+              </a:ext>
+            </a:extLst>
+          </a:blip>
+          <a:srcRect/>
+          <a:stretch>
+            <a:fillRect/>
+          </a:stretch>
+        </p:blipFill>
+        <p:spPr bwMode="auto">
+          <a:xfrm>
+            <a:off x="5576792" y="4149081"/>
+            <a:ext cx="3071450" cy="2273476"/>
+          </a:xfrm>
+          <a:prstGeom prst="rect">
+            <a:avLst/>
+          </a:prstGeom>
+          <a:noFill/>
+          <a:extLst>
+            <a:ext uri="{909E8E84-426E-40DD-AFC4-6F175D3DCCD1}">
+              <a14:hiddenFill xmlns:a14="http://schemas.microsoft.com/office/drawing/2010/main">
+                <a:solidFill>
+                  <a:srgbClr val="FFFFFF"/>
+                </a:solidFill>
+              </a14:hiddenFill>
+            </a:ext>
+          </a:extLst>
+        </p:spPr>
+      </p:pic>
+    </p:spTree>
+    <p:extLst>
+      <p:ext uri="{BB962C8B-B14F-4D97-AF65-F5344CB8AC3E}">
+        <p14:creationId xmlns:p14="http://schemas.microsoft.com/office/powerpoint/2010/main" val="2040032672"/>
+      </p:ext>
+    </p:extLst>
+  </p:cSld>
+  <p:clrMapOvr>
+    <a:masterClrMapping/>
+  </p:clrMapOvr>
 </p:sld>
 </file>
 
@@ -4594,13 +5599,1158 @@
   <p:clrMapOvr>
     <a:masterClrMapping/>
   </p:clrMapOvr>
-  <p:timing>
-    <p:tnLst>
-      <p:par>
-        <p:cTn id="1" dur="indefinite" restart="never" nodeType="tmRoot"/>
-      </p:par>
-    </p:tnLst>
-  </p:timing>
+</p:sld>
+</file>
+
+<file path=ppt/slides/slide20.xml><?xml version="1.0" encoding="utf-8"?>
+<p:sld xmlns:a="http://schemas.openxmlformats.org/drawingml/2006/main" xmlns:r="http://schemas.openxmlformats.org/officeDocument/2006/relationships" xmlns:p="http://schemas.openxmlformats.org/presentationml/2006/main">
+  <p:cSld>
+    <p:spTree>
+      <p:nvGrpSpPr>
+        <p:cNvPr id="1" name=""/>
+        <p:cNvGrpSpPr/>
+        <p:nvPr/>
+      </p:nvGrpSpPr>
+      <p:grpSpPr>
+        <a:xfrm>
+          <a:off x="0" y="0"/>
+          <a:ext cx="0" cy="0"/>
+          <a:chOff x="0" y="0"/>
+          <a:chExt cx="0" cy="0"/>
+        </a:xfrm>
+      </p:grpSpPr>
+      <p:sp>
+        <p:nvSpPr>
+          <p:cNvPr id="2" name="Titre 1"/>
+          <p:cNvSpPr>
+            <a:spLocks noGrp="1"/>
+          </p:cNvSpPr>
+          <p:nvPr>
+            <p:ph type="title"/>
+          </p:nvPr>
+        </p:nvSpPr>
+        <p:spPr/>
+        <p:txBody>
+          <a:bodyPr/>
+          <a:lstStyle/>
+          <a:p>
+            <a:r>
+              <a:rPr lang="fr-FR" dirty="0"/>
+              <a:t>Stats</a:t>
+            </a:r>
+          </a:p>
+        </p:txBody>
+      </p:sp>
+      <p:sp>
+        <p:nvSpPr>
+          <p:cNvPr id="3" name="Espace réservé du contenu 2"/>
+          <p:cNvSpPr>
+            <a:spLocks noGrp="1"/>
+          </p:cNvSpPr>
+          <p:nvPr>
+            <p:ph idx="1"/>
+          </p:nvPr>
+        </p:nvSpPr>
+        <p:spPr/>
+        <p:txBody>
+          <a:bodyPr/>
+          <a:lstStyle/>
+          <a:p>
+            <a:r>
+              <a:rPr lang="fr-FR" dirty="0"/>
+              <a:t>Outils pour les statistiques</a:t>
+            </a:r>
+          </a:p>
+          <a:p>
+            <a:endParaRPr lang="fr-FR" dirty="0"/>
+          </a:p>
+          <a:p>
+            <a:endParaRPr lang="fr-FR" dirty="0"/>
+          </a:p>
+          <a:p>
+            <a:endParaRPr lang="fr-FR" dirty="0"/>
+          </a:p>
+          <a:p>
+            <a:endParaRPr lang="fr-FR" dirty="0"/>
+          </a:p>
+          <a:p>
+            <a:r>
+              <a:rPr lang="fr-FR" dirty="0"/>
+              <a:t>écart type</a:t>
+            </a:r>
+          </a:p>
+          <a:p>
+            <a:pPr lvl="1"/>
+            <a:r>
+              <a:rPr lang="fr-FR" dirty="0" err="1"/>
+              <a:t>np.std</a:t>
+            </a:r>
+            <a:r>
+              <a:rPr lang="fr-FR" dirty="0"/>
+              <a:t>()</a:t>
+            </a:r>
+          </a:p>
+        </p:txBody>
+      </p:sp>
+      <p:pic>
+        <p:nvPicPr>
+          <p:cNvPr id="4" name="Image 3"/>
+          <p:cNvPicPr>
+            <a:picLocks noChangeAspect="1"/>
+          </p:cNvPicPr>
+          <p:nvPr/>
+        </p:nvPicPr>
+        <p:blipFill>
+          <a:blip r:embed="rId2"/>
+          <a:stretch>
+            <a:fillRect/>
+          </a:stretch>
+        </p:blipFill>
+        <p:spPr>
+          <a:xfrm>
+            <a:off x="827584" y="2060848"/>
+            <a:ext cx="6457366" cy="1728192"/>
+          </a:xfrm>
+          <a:prstGeom prst="rect">
+            <a:avLst/>
+          </a:prstGeom>
+        </p:spPr>
+      </p:pic>
+    </p:spTree>
+    <p:extLst>
+      <p:ext uri="{BB962C8B-B14F-4D97-AF65-F5344CB8AC3E}">
+        <p14:creationId xmlns:p14="http://schemas.microsoft.com/office/powerpoint/2010/main" val="3492452167"/>
+      </p:ext>
+    </p:extLst>
+  </p:cSld>
+  <p:clrMapOvr>
+    <a:masterClrMapping/>
+  </p:clrMapOvr>
+</p:sld>
+</file>
+
+<file path=ppt/slides/slide21.xml><?xml version="1.0" encoding="utf-8"?>
+<p:sld xmlns:a="http://schemas.openxmlformats.org/drawingml/2006/main" xmlns:r="http://schemas.openxmlformats.org/officeDocument/2006/relationships" xmlns:p="http://schemas.openxmlformats.org/presentationml/2006/main">
+  <p:cSld>
+    <p:spTree>
+      <p:nvGrpSpPr>
+        <p:cNvPr id="1" name=""/>
+        <p:cNvGrpSpPr/>
+        <p:nvPr/>
+      </p:nvGrpSpPr>
+      <p:grpSpPr>
+        <a:xfrm>
+          <a:off x="0" y="0"/>
+          <a:ext cx="0" cy="0"/>
+          <a:chOff x="0" y="0"/>
+          <a:chExt cx="0" cy="0"/>
+        </a:xfrm>
+      </p:grpSpPr>
+      <p:sp>
+        <p:nvSpPr>
+          <p:cNvPr id="2" name="Titre 1"/>
+          <p:cNvSpPr>
+            <a:spLocks noGrp="1"/>
+          </p:cNvSpPr>
+          <p:nvPr>
+            <p:ph type="title"/>
+          </p:nvPr>
+        </p:nvSpPr>
+        <p:spPr/>
+        <p:txBody>
+          <a:bodyPr/>
+          <a:lstStyle/>
+          <a:p>
+            <a:r>
+              <a:rPr lang="fr-FR" dirty="0"/>
+              <a:t>Théorème centrale limite</a:t>
+            </a:r>
+          </a:p>
+        </p:txBody>
+      </p:sp>
+      <p:sp>
+        <p:nvSpPr>
+          <p:cNvPr id="3" name="Espace réservé du contenu 2"/>
+          <p:cNvSpPr>
+            <a:spLocks noGrp="1"/>
+          </p:cNvSpPr>
+          <p:nvPr>
+            <p:ph idx="1"/>
+          </p:nvPr>
+        </p:nvSpPr>
+        <p:spPr/>
+        <p:txBody>
+          <a:bodyPr/>
+          <a:lstStyle/>
+          <a:p>
+            <a:r>
+              <a:rPr lang="fr-FR" dirty="0"/>
+              <a:t>Soit une matrice aléatoire avec des valeurs [-n, n]</a:t>
+            </a:r>
+          </a:p>
+          <a:p>
+            <a:pPr lvl="1"/>
+            <a:r>
+              <a:rPr lang="fr-FR" dirty="0"/>
+              <a:t>La moyenne et la somme est 0</a:t>
+            </a:r>
+          </a:p>
+          <a:p>
+            <a:pPr lvl="1"/>
+            <a:r>
+              <a:rPr lang="fr-FR" dirty="0"/>
+              <a:t>La distribution des sommes des lignes est gaussienne centrée sur 0</a:t>
+            </a:r>
+          </a:p>
+          <a:p>
+            <a:pPr lvl="1"/>
+            <a:r>
+              <a:rPr lang="fr-FR" dirty="0"/>
+              <a:t>Médiane = moyenne</a:t>
+            </a:r>
+          </a:p>
+          <a:p>
+            <a:pPr lvl="1"/>
+            <a:endParaRPr lang="fr-FR" dirty="0"/>
+          </a:p>
+          <a:p>
+            <a:pPr lvl="1"/>
+            <a:endParaRPr lang="fr-FR" dirty="0"/>
+          </a:p>
+        </p:txBody>
+      </p:sp>
+    </p:spTree>
+    <p:extLst>
+      <p:ext uri="{BB962C8B-B14F-4D97-AF65-F5344CB8AC3E}">
+        <p14:creationId xmlns:p14="http://schemas.microsoft.com/office/powerpoint/2010/main" val="1041234874"/>
+      </p:ext>
+    </p:extLst>
+  </p:cSld>
+  <p:clrMapOvr>
+    <a:masterClrMapping/>
+  </p:clrMapOvr>
+</p:sld>
+</file>
+
+<file path=ppt/slides/slide22.xml><?xml version="1.0" encoding="utf-8"?>
+<p:sld xmlns:a="http://schemas.openxmlformats.org/drawingml/2006/main" xmlns:r="http://schemas.openxmlformats.org/officeDocument/2006/relationships" xmlns:p="http://schemas.openxmlformats.org/presentationml/2006/main">
+  <p:cSld>
+    <p:spTree>
+      <p:nvGrpSpPr>
+        <p:cNvPr id="1" name=""/>
+        <p:cNvGrpSpPr/>
+        <p:nvPr/>
+      </p:nvGrpSpPr>
+      <p:grpSpPr>
+        <a:xfrm>
+          <a:off x="0" y="0"/>
+          <a:ext cx="0" cy="0"/>
+          <a:chOff x="0" y="0"/>
+          <a:chExt cx="0" cy="0"/>
+        </a:xfrm>
+      </p:grpSpPr>
+      <p:sp>
+        <p:nvSpPr>
+          <p:cNvPr id="2" name="Titre 1">
+            <a:extLst>
+              <a:ext uri="{FF2B5EF4-FFF2-40B4-BE49-F238E27FC236}">
+                <a16:creationId xmlns:a16="http://schemas.microsoft.com/office/drawing/2014/main" id="{06C879E6-7CC0-4EF3-CD51-B8D9FFD2D2A5}"/>
+              </a:ext>
+            </a:extLst>
+          </p:cNvPr>
+          <p:cNvSpPr>
+            <a:spLocks noGrp="1"/>
+          </p:cNvSpPr>
+          <p:nvPr>
+            <p:ph type="title"/>
+          </p:nvPr>
+        </p:nvSpPr>
+        <p:spPr/>
+        <p:txBody>
+          <a:bodyPr/>
+          <a:lstStyle/>
+          <a:p>
+            <a:r>
+              <a:rPr lang="fr-FR" dirty="0" err="1"/>
+              <a:t>StandardScaler</a:t>
+            </a:r>
+            <a:endParaRPr lang="fr-FR" dirty="0"/>
+          </a:p>
+        </p:txBody>
+      </p:sp>
+      <p:sp>
+        <p:nvSpPr>
+          <p:cNvPr id="3" name="Espace réservé du contenu 2">
+            <a:extLst>
+              <a:ext uri="{FF2B5EF4-FFF2-40B4-BE49-F238E27FC236}">
+                <a16:creationId xmlns:a16="http://schemas.microsoft.com/office/drawing/2014/main" id="{96515957-0254-78DE-558C-C28A6D222DD4}"/>
+              </a:ext>
+            </a:extLst>
+          </p:cNvPr>
+          <p:cNvSpPr>
+            <a:spLocks noGrp="1"/>
+          </p:cNvSpPr>
+          <p:nvPr>
+            <p:ph idx="1"/>
+          </p:nvPr>
+        </p:nvSpPr>
+        <p:spPr/>
+        <p:txBody>
+          <a:bodyPr/>
+          <a:lstStyle/>
+          <a:p>
+            <a:r>
+              <a:rPr lang="fr-FR" dirty="0"/>
+              <a:t>Normalise les données entre [-</a:t>
+            </a:r>
+            <a:r>
+              <a:rPr lang="fr-FR" dirty="0" err="1"/>
+              <a:t>inf</a:t>
+            </a:r>
+            <a:r>
+              <a:rPr lang="fr-FR" dirty="0"/>
+              <a:t>;+</a:t>
+            </a:r>
+            <a:r>
+              <a:rPr lang="fr-FR" dirty="0" err="1"/>
+              <a:t>inf</a:t>
+            </a:r>
+            <a:r>
+              <a:rPr lang="fr-FR" dirty="0"/>
+              <a:t>] centrées sur zéro avec un écart type à 1</a:t>
+            </a:r>
+          </a:p>
+          <a:p>
+            <a:pPr lvl="1"/>
+            <a:r>
+              <a:rPr lang="fr-FR" dirty="0"/>
+              <a:t>C'est mathématiquement une loi centrée réduite</a:t>
+            </a:r>
+          </a:p>
+          <a:p>
+            <a:pPr lvl="1"/>
+            <a:r>
+              <a:rPr lang="fr-FR" dirty="0"/>
+              <a:t>On calcul pour chaque </a:t>
+            </a:r>
+            <a:r>
+              <a:rPr lang="fr-FR" dirty="0" err="1"/>
+              <a:t>feature</a:t>
+            </a:r>
+            <a:r>
+              <a:rPr lang="fr-FR" dirty="0"/>
+              <a:t> la moyenne et l'écart type</a:t>
+            </a:r>
+          </a:p>
+          <a:p>
+            <a:r>
+              <a:rPr lang="fr-FR" dirty="0" err="1"/>
+              <a:t>scaler</a:t>
+            </a:r>
+            <a:r>
+              <a:rPr lang="fr-FR" dirty="0"/>
+              <a:t>(x) = (x – </a:t>
+            </a:r>
+            <a:r>
+              <a:rPr lang="fr-FR" dirty="0" err="1"/>
+              <a:t>mean</a:t>
+            </a:r>
+            <a:r>
+              <a:rPr lang="fr-FR" dirty="0"/>
+              <a:t>) / std</a:t>
+            </a:r>
+          </a:p>
+          <a:p>
+            <a:pPr lvl="1"/>
+            <a:r>
+              <a:rPr lang="fr-FR" dirty="0"/>
+              <a:t>Ne fonctionne pas correctement si la distribution n'est pas une loi normale</a:t>
+            </a:r>
+          </a:p>
+          <a:p>
+            <a:endParaRPr lang="fr-FR" dirty="0"/>
+          </a:p>
+          <a:p>
+            <a:pPr lvl="1"/>
+            <a:endParaRPr lang="fr-FR" dirty="0"/>
+          </a:p>
+        </p:txBody>
+      </p:sp>
+    </p:spTree>
+    <p:extLst>
+      <p:ext uri="{BB962C8B-B14F-4D97-AF65-F5344CB8AC3E}">
+        <p14:creationId xmlns:p14="http://schemas.microsoft.com/office/powerpoint/2010/main" val="2921821589"/>
+      </p:ext>
+    </p:extLst>
+  </p:cSld>
+  <p:clrMapOvr>
+    <a:masterClrMapping/>
+  </p:clrMapOvr>
+</p:sld>
+</file>
+
+<file path=ppt/slides/slide23.xml><?xml version="1.0" encoding="utf-8"?>
+<p:sld xmlns:a="http://schemas.openxmlformats.org/drawingml/2006/main" xmlns:r="http://schemas.openxmlformats.org/officeDocument/2006/relationships" xmlns:p="http://schemas.openxmlformats.org/presentationml/2006/main">
+  <p:cSld>
+    <p:spTree>
+      <p:nvGrpSpPr>
+        <p:cNvPr id="1" name=""/>
+        <p:cNvGrpSpPr/>
+        <p:nvPr/>
+      </p:nvGrpSpPr>
+      <p:grpSpPr>
+        <a:xfrm>
+          <a:off x="0" y="0"/>
+          <a:ext cx="0" cy="0"/>
+          <a:chOff x="0" y="0"/>
+          <a:chExt cx="0" cy="0"/>
+        </a:xfrm>
+      </p:grpSpPr>
+      <p:sp>
+        <p:nvSpPr>
+          <p:cNvPr id="2" name="Titre 1"/>
+          <p:cNvSpPr>
+            <a:spLocks noGrp="1"/>
+          </p:cNvSpPr>
+          <p:nvPr>
+            <p:ph type="title"/>
+          </p:nvPr>
+        </p:nvSpPr>
+        <p:spPr/>
+        <p:txBody>
+          <a:bodyPr/>
+          <a:lstStyle/>
+          <a:p>
+            <a:r>
+              <a:rPr lang="fr-FR" dirty="0"/>
+              <a:t>Cas non gaussien</a:t>
+            </a:r>
+          </a:p>
+        </p:txBody>
+      </p:sp>
+      <p:sp>
+        <p:nvSpPr>
+          <p:cNvPr id="3" name="Espace réservé du contenu 2"/>
+          <p:cNvSpPr>
+            <a:spLocks noGrp="1"/>
+          </p:cNvSpPr>
+          <p:nvPr>
+            <p:ph idx="1"/>
+          </p:nvPr>
+        </p:nvSpPr>
+        <p:spPr/>
+        <p:txBody>
+          <a:bodyPr/>
+          <a:lstStyle/>
+          <a:p>
+            <a:r>
+              <a:rPr lang="fr-FR" dirty="0"/>
+              <a:t>Les distribution des salaire en France ne suit pas une gaussienne</a:t>
+            </a:r>
+          </a:p>
+          <a:p>
+            <a:pPr lvl="1"/>
+            <a:r>
+              <a:rPr lang="fr-FR" dirty="0"/>
+              <a:t>C’est une gaussienne asymétrique</a:t>
+            </a:r>
+          </a:p>
+          <a:p>
+            <a:r>
+              <a:rPr lang="fr-FR" dirty="0"/>
+              <a:t>La moyenne et l’écart type n’ont pas de sens</a:t>
+            </a:r>
+          </a:p>
+          <a:p>
+            <a:r>
+              <a:rPr lang="fr-FR" dirty="0"/>
+              <a:t>Il faut utilise la médiane et les *iles</a:t>
+            </a:r>
+          </a:p>
+          <a:p>
+            <a:r>
+              <a:rPr lang="fr-FR" dirty="0"/>
+              <a:t>Exemple</a:t>
+            </a:r>
+          </a:p>
+          <a:p>
+            <a:pPr lvl="1"/>
+            <a:r>
+              <a:rPr lang="fr-FR" dirty="0"/>
+              <a:t>Salaire équivalent temps plein net</a:t>
+            </a:r>
+          </a:p>
+          <a:p>
+            <a:pPr lvl="1"/>
+            <a:r>
+              <a:rPr lang="fr-FR" dirty="0"/>
+              <a:t>Salaire moyen : 2250 €</a:t>
+            </a:r>
+          </a:p>
+          <a:p>
+            <a:pPr lvl="1"/>
+            <a:r>
+              <a:rPr lang="fr-FR" dirty="0"/>
+              <a:t>Salaire médian : 1797 €</a:t>
+            </a:r>
+          </a:p>
+          <a:p>
+            <a:pPr lvl="1"/>
+            <a:endParaRPr lang="fr-FR" dirty="0"/>
+          </a:p>
+        </p:txBody>
+      </p:sp>
+      <p:pic>
+        <p:nvPicPr>
+          <p:cNvPr id="5122" name="Picture 2" descr="Résultat de recherche d'images pour &quot;distribution des salaires en france&quot;"/>
+          <p:cNvPicPr>
+            <a:picLocks noChangeAspect="1" noChangeArrowheads="1"/>
+          </p:cNvPicPr>
+          <p:nvPr/>
+        </p:nvPicPr>
+        <p:blipFill>
+          <a:blip r:embed="rId2" cstate="print">
+            <a:extLst>
+              <a:ext uri="{28A0092B-C50C-407E-A947-70E740481C1C}">
+                <a14:useLocalDpi xmlns:a14="http://schemas.microsoft.com/office/drawing/2010/main" val="0"/>
+              </a:ext>
+            </a:extLst>
+          </a:blip>
+          <a:srcRect/>
+          <a:stretch>
+            <a:fillRect/>
+          </a:stretch>
+        </p:blipFill>
+        <p:spPr bwMode="auto">
+          <a:xfrm>
+            <a:off x="5657864" y="3789040"/>
+            <a:ext cx="3367370" cy="2262577"/>
+          </a:xfrm>
+          <a:prstGeom prst="rect">
+            <a:avLst/>
+          </a:prstGeom>
+          <a:noFill/>
+          <a:extLst>
+            <a:ext uri="{909E8E84-426E-40DD-AFC4-6F175D3DCCD1}">
+              <a14:hiddenFill xmlns:a14="http://schemas.microsoft.com/office/drawing/2010/main">
+                <a:solidFill>
+                  <a:srgbClr val="FFFFFF"/>
+                </a:solidFill>
+              </a14:hiddenFill>
+            </a:ext>
+          </a:extLst>
+        </p:spPr>
+      </p:pic>
+    </p:spTree>
+    <p:extLst>
+      <p:ext uri="{BB962C8B-B14F-4D97-AF65-F5344CB8AC3E}">
+        <p14:creationId xmlns:p14="http://schemas.microsoft.com/office/powerpoint/2010/main" val="1440907415"/>
+      </p:ext>
+    </p:extLst>
+  </p:cSld>
+  <p:clrMapOvr>
+    <a:masterClrMapping/>
+  </p:clrMapOvr>
+</p:sld>
+</file>
+
+<file path=ppt/slides/slide24.xml><?xml version="1.0" encoding="utf-8"?>
+<p:sld xmlns:a="http://schemas.openxmlformats.org/drawingml/2006/main" xmlns:r="http://schemas.openxmlformats.org/officeDocument/2006/relationships" xmlns:p="http://schemas.openxmlformats.org/presentationml/2006/main">
+  <p:cSld>
+    <p:spTree>
+      <p:nvGrpSpPr>
+        <p:cNvPr id="1" name=""/>
+        <p:cNvGrpSpPr/>
+        <p:nvPr/>
+      </p:nvGrpSpPr>
+      <p:grpSpPr>
+        <a:xfrm>
+          <a:off x="0" y="0"/>
+          <a:ext cx="0" cy="0"/>
+          <a:chOff x="0" y="0"/>
+          <a:chExt cx="0" cy="0"/>
+        </a:xfrm>
+      </p:grpSpPr>
+      <p:sp>
+        <p:nvSpPr>
+          <p:cNvPr id="2" name="Titre 1"/>
+          <p:cNvSpPr>
+            <a:spLocks noGrp="1"/>
+          </p:cNvSpPr>
+          <p:nvPr>
+            <p:ph type="title"/>
+          </p:nvPr>
+        </p:nvSpPr>
+        <p:spPr/>
+        <p:txBody>
+          <a:bodyPr/>
+          <a:lstStyle/>
+          <a:p>
+            <a:r>
+              <a:rPr lang="fr-FR" dirty="0"/>
+              <a:t>Cas non gaussiens</a:t>
+            </a:r>
+          </a:p>
+        </p:txBody>
+      </p:sp>
+      <p:sp>
+        <p:nvSpPr>
+          <p:cNvPr id="3" name="Espace réservé du contenu 2"/>
+          <p:cNvSpPr>
+            <a:spLocks noGrp="1"/>
+          </p:cNvSpPr>
+          <p:nvPr>
+            <p:ph idx="1"/>
+          </p:nvPr>
+        </p:nvSpPr>
+        <p:spPr/>
+        <p:txBody>
+          <a:bodyPr/>
+          <a:lstStyle/>
+          <a:p>
+            <a:r>
+              <a:rPr lang="fr-FR" dirty="0" err="1"/>
+              <a:t>Median</a:t>
+            </a:r>
+            <a:endParaRPr lang="fr-FR" dirty="0"/>
+          </a:p>
+          <a:p>
+            <a:pPr lvl="1"/>
+            <a:r>
+              <a:rPr lang="fr-FR" dirty="0"/>
+              <a:t>Médiane</a:t>
+            </a:r>
+          </a:p>
+          <a:p>
+            <a:pPr lvl="1"/>
+            <a:r>
+              <a:rPr lang="fr-FR" dirty="0"/>
+              <a:t>50% des valeurs au dessous et 50% </a:t>
+            </a:r>
+            <a:r>
+              <a:rPr lang="fr-FR"/>
+              <a:t>au dessus</a:t>
+            </a:r>
+            <a:endParaRPr lang="fr-FR" dirty="0"/>
+          </a:p>
+          <a:p>
+            <a:r>
+              <a:rPr lang="fr-FR" dirty="0"/>
+              <a:t>Quantile</a:t>
+            </a:r>
+          </a:p>
+          <a:p>
+            <a:pPr lvl="1"/>
+            <a:r>
+              <a:rPr lang="fr-FR" dirty="0"/>
+              <a:t>Le 2</a:t>
+            </a:r>
+            <a:r>
+              <a:rPr lang="fr-FR" baseline="30000" dirty="0"/>
+              <a:t>ème</a:t>
+            </a:r>
+            <a:r>
+              <a:rPr lang="fr-FR" dirty="0"/>
+              <a:t> paramètre représente le quantile</a:t>
+            </a:r>
+          </a:p>
+          <a:p>
+            <a:pPr lvl="1"/>
+            <a:r>
+              <a:rPr lang="fr-FR" dirty="0"/>
+              <a:t>0.5 = médiane</a:t>
+            </a:r>
+          </a:p>
+          <a:p>
+            <a:pPr lvl="1"/>
+            <a:r>
+              <a:rPr lang="fr-FR" dirty="0"/>
+              <a:t>0.25 = quartile</a:t>
+            </a:r>
+          </a:p>
+          <a:p>
+            <a:pPr lvl="1"/>
+            <a:r>
+              <a:rPr lang="fr-FR" dirty="0"/>
+              <a:t>0.1 = décile</a:t>
+            </a:r>
+          </a:p>
+        </p:txBody>
+      </p:sp>
+      <p:pic>
+        <p:nvPicPr>
+          <p:cNvPr id="2050" name="Picture 2" descr="https://media.geeksforgeeks.org/wp-content/uploads/quantile.jpg"/>
+          <p:cNvPicPr>
+            <a:picLocks noChangeAspect="1" noChangeArrowheads="1"/>
+          </p:cNvPicPr>
+          <p:nvPr/>
+        </p:nvPicPr>
+        <p:blipFill>
+          <a:blip r:embed="rId2">
+            <a:extLst>
+              <a:ext uri="{28A0092B-C50C-407E-A947-70E740481C1C}">
+                <a14:useLocalDpi xmlns:a14="http://schemas.microsoft.com/office/drawing/2010/main" val="0"/>
+              </a:ext>
+            </a:extLst>
+          </a:blip>
+          <a:srcRect/>
+          <a:stretch>
+            <a:fillRect/>
+          </a:stretch>
+        </p:blipFill>
+        <p:spPr bwMode="auto">
+          <a:xfrm>
+            <a:off x="5321042" y="4437112"/>
+            <a:ext cx="3600400" cy="1921878"/>
+          </a:xfrm>
+          <a:prstGeom prst="rect">
+            <a:avLst/>
+          </a:prstGeom>
+          <a:noFill/>
+          <a:extLst>
+            <a:ext uri="{909E8E84-426E-40DD-AFC4-6F175D3DCCD1}">
+              <a14:hiddenFill xmlns:a14="http://schemas.microsoft.com/office/drawing/2010/main">
+                <a:solidFill>
+                  <a:srgbClr val="FFFFFF"/>
+                </a:solidFill>
+              </a14:hiddenFill>
+            </a:ext>
+          </a:extLst>
+        </p:spPr>
+      </p:pic>
+    </p:spTree>
+    <p:extLst>
+      <p:ext uri="{BB962C8B-B14F-4D97-AF65-F5344CB8AC3E}">
+        <p14:creationId xmlns:p14="http://schemas.microsoft.com/office/powerpoint/2010/main" val="3934027036"/>
+      </p:ext>
+    </p:extLst>
+  </p:cSld>
+  <p:clrMapOvr>
+    <a:masterClrMapping/>
+  </p:clrMapOvr>
+</p:sld>
+</file>
+
+<file path=ppt/slides/slide25.xml><?xml version="1.0" encoding="utf-8"?>
+<p:sld xmlns:a="http://schemas.openxmlformats.org/drawingml/2006/main" xmlns:r="http://schemas.openxmlformats.org/officeDocument/2006/relationships" xmlns:p="http://schemas.openxmlformats.org/presentationml/2006/main">
+  <p:cSld>
+    <p:spTree>
+      <p:nvGrpSpPr>
+        <p:cNvPr id="1" name="">
+          <a:extLst>
+            <a:ext uri="{FF2B5EF4-FFF2-40B4-BE49-F238E27FC236}">
+              <a16:creationId xmlns:a16="http://schemas.microsoft.com/office/drawing/2014/main" id="{9CF059B5-C550-FF7B-7B34-5DF193540675}"/>
+            </a:ext>
+          </a:extLst>
+        </p:cNvPr>
+        <p:cNvGrpSpPr/>
+        <p:nvPr/>
+      </p:nvGrpSpPr>
+      <p:grpSpPr>
+        <a:xfrm>
+          <a:off x="0" y="0"/>
+          <a:ext cx="0" cy="0"/>
+          <a:chOff x="0" y="0"/>
+          <a:chExt cx="0" cy="0"/>
+        </a:xfrm>
+      </p:grpSpPr>
+      <p:sp>
+        <p:nvSpPr>
+          <p:cNvPr id="2" name="Titre 1">
+            <a:extLst>
+              <a:ext uri="{FF2B5EF4-FFF2-40B4-BE49-F238E27FC236}">
+                <a16:creationId xmlns:a16="http://schemas.microsoft.com/office/drawing/2014/main" id="{EA39D681-831F-5C16-8FDF-51789EE56D31}"/>
+              </a:ext>
+            </a:extLst>
+          </p:cNvPr>
+          <p:cNvSpPr>
+            <a:spLocks noGrp="1"/>
+          </p:cNvSpPr>
+          <p:nvPr>
+            <p:ph type="title"/>
+          </p:nvPr>
+        </p:nvSpPr>
+        <p:spPr/>
+        <p:txBody>
+          <a:bodyPr/>
+          <a:lstStyle/>
+          <a:p>
+            <a:r>
+              <a:rPr lang="fr-FR" dirty="0" err="1"/>
+              <a:t>RobustScaler</a:t>
+            </a:r>
+            <a:endParaRPr lang="fr-FR" dirty="0"/>
+          </a:p>
+        </p:txBody>
+      </p:sp>
+      <p:sp>
+        <p:nvSpPr>
+          <p:cNvPr id="3" name="Espace réservé du contenu 2">
+            <a:extLst>
+              <a:ext uri="{FF2B5EF4-FFF2-40B4-BE49-F238E27FC236}">
+                <a16:creationId xmlns:a16="http://schemas.microsoft.com/office/drawing/2014/main" id="{CA15126D-5289-94E1-965C-0CD7014D796C}"/>
+              </a:ext>
+            </a:extLst>
+          </p:cNvPr>
+          <p:cNvSpPr>
+            <a:spLocks noGrp="1"/>
+          </p:cNvSpPr>
+          <p:nvPr>
+            <p:ph idx="1"/>
+          </p:nvPr>
+        </p:nvSpPr>
+        <p:spPr/>
+        <p:txBody>
+          <a:bodyPr/>
+          <a:lstStyle/>
+          <a:p>
+            <a:r>
+              <a:rPr lang="fr-FR" dirty="0"/>
+              <a:t>Normalise les données entre [-</a:t>
+            </a:r>
+            <a:r>
+              <a:rPr lang="fr-FR" dirty="0" err="1"/>
+              <a:t>inf</a:t>
+            </a:r>
+            <a:r>
+              <a:rPr lang="fr-FR" dirty="0"/>
+              <a:t>;+</a:t>
+            </a:r>
+            <a:r>
+              <a:rPr lang="fr-FR" dirty="0" err="1"/>
+              <a:t>inf</a:t>
+            </a:r>
+            <a:r>
+              <a:rPr lang="fr-FR" dirty="0"/>
+              <a:t>] centrées sur zéro avec une médiane à 1</a:t>
+            </a:r>
+          </a:p>
+          <a:p>
+            <a:pPr lvl="1"/>
+            <a:r>
+              <a:rPr lang="fr-FR" dirty="0"/>
+              <a:t>On calcul pour chaque </a:t>
+            </a:r>
+            <a:r>
+              <a:rPr lang="fr-FR" dirty="0" err="1"/>
+              <a:t>feature</a:t>
+            </a:r>
+            <a:r>
+              <a:rPr lang="fr-FR" dirty="0"/>
+              <a:t> la </a:t>
+            </a:r>
+            <a:r>
+              <a:rPr lang="fr-FR" dirty="0" err="1"/>
+              <a:t>médianne</a:t>
+            </a:r>
+            <a:r>
+              <a:rPr lang="fr-FR" dirty="0"/>
+              <a:t> et les quartiles</a:t>
+            </a:r>
+          </a:p>
+          <a:p>
+            <a:r>
+              <a:rPr lang="fr-FR" dirty="0" err="1"/>
+              <a:t>scaler</a:t>
+            </a:r>
+            <a:r>
+              <a:rPr lang="fr-FR" dirty="0"/>
+              <a:t>(x) = (x – </a:t>
+            </a:r>
+            <a:r>
+              <a:rPr lang="fr-FR" dirty="0" err="1"/>
+              <a:t>median</a:t>
+            </a:r>
+            <a:r>
+              <a:rPr lang="fr-FR" dirty="0"/>
+              <a:t>) / ((</a:t>
+            </a:r>
+            <a:r>
+              <a:rPr lang="fr-FR" dirty="0" err="1"/>
+              <a:t>median</a:t>
+            </a:r>
+            <a:r>
+              <a:rPr lang="fr-FR" dirty="0"/>
+              <a:t> – q25) if x &lt; </a:t>
+            </a:r>
+            <a:r>
+              <a:rPr lang="fr-FR" dirty="0" err="1"/>
+              <a:t>median</a:t>
+            </a:r>
+            <a:r>
+              <a:rPr lang="fr-FR" dirty="0"/>
+              <a:t> </a:t>
+            </a:r>
+            <a:r>
+              <a:rPr lang="fr-FR" dirty="0" err="1"/>
+              <a:t>else</a:t>
+            </a:r>
+            <a:r>
+              <a:rPr lang="fr-FR" dirty="0"/>
+              <a:t> (q75 – </a:t>
+            </a:r>
+            <a:r>
+              <a:rPr lang="fr-FR" dirty="0" err="1"/>
+              <a:t>median</a:t>
+            </a:r>
+            <a:r>
+              <a:rPr lang="fr-FR" dirty="0"/>
+              <a:t>))</a:t>
+            </a:r>
+          </a:p>
+          <a:p>
+            <a:pPr lvl="1"/>
+            <a:r>
+              <a:rPr lang="fr-FR" dirty="0"/>
+              <a:t>Ne fonctionne pas correctement si la distribution a la forme d'une multi gaussienne</a:t>
+            </a:r>
+          </a:p>
+          <a:p>
+            <a:endParaRPr lang="fr-FR" dirty="0"/>
+          </a:p>
+          <a:p>
+            <a:pPr lvl="1"/>
+            <a:endParaRPr lang="fr-FR" dirty="0"/>
+          </a:p>
+        </p:txBody>
+      </p:sp>
+      <p:pic>
+        <p:nvPicPr>
+          <p:cNvPr id="5" name="Image 4">
+            <a:extLst>
+              <a:ext uri="{FF2B5EF4-FFF2-40B4-BE49-F238E27FC236}">
+                <a16:creationId xmlns:a16="http://schemas.microsoft.com/office/drawing/2014/main" id="{AC5DB9E2-CDD9-2C22-EB82-B11C046172BF}"/>
+              </a:ext>
+            </a:extLst>
+          </p:cNvPr>
+          <p:cNvPicPr>
+            <a:picLocks noChangeAspect="1"/>
+          </p:cNvPicPr>
+          <p:nvPr/>
+        </p:nvPicPr>
+        <p:blipFill>
+          <a:blip r:embed="rId2"/>
+          <a:stretch>
+            <a:fillRect/>
+          </a:stretch>
+        </p:blipFill>
+        <p:spPr>
+          <a:xfrm>
+            <a:off x="5924101" y="4888514"/>
+            <a:ext cx="3219899" cy="1933845"/>
+          </a:xfrm>
+          <a:prstGeom prst="rect">
+            <a:avLst/>
+          </a:prstGeom>
+        </p:spPr>
+      </p:pic>
+    </p:spTree>
+    <p:extLst>
+      <p:ext uri="{BB962C8B-B14F-4D97-AF65-F5344CB8AC3E}">
+        <p14:creationId xmlns:p14="http://schemas.microsoft.com/office/powerpoint/2010/main" val="2270194856"/>
+      </p:ext>
+    </p:extLst>
+  </p:cSld>
+  <p:clrMapOvr>
+    <a:masterClrMapping/>
+  </p:clrMapOvr>
+</p:sld>
+</file>
+
+<file path=ppt/slides/slide26.xml><?xml version="1.0" encoding="utf-8"?>
+<p:sld xmlns:a="http://schemas.openxmlformats.org/drawingml/2006/main" xmlns:r="http://schemas.openxmlformats.org/officeDocument/2006/relationships" xmlns:p="http://schemas.openxmlformats.org/presentationml/2006/main">
+  <p:cSld>
+    <p:spTree>
+      <p:nvGrpSpPr>
+        <p:cNvPr id="1" name=""/>
+        <p:cNvGrpSpPr/>
+        <p:nvPr/>
+      </p:nvGrpSpPr>
+      <p:grpSpPr>
+        <a:xfrm>
+          <a:off x="0" y="0"/>
+          <a:ext cx="0" cy="0"/>
+          <a:chOff x="0" y="0"/>
+          <a:chExt cx="0" cy="0"/>
+        </a:xfrm>
+      </p:grpSpPr>
+      <p:sp>
+        <p:nvSpPr>
+          <p:cNvPr id="2" name="Titre 1">
+            <a:extLst>
+              <a:ext uri="{FF2B5EF4-FFF2-40B4-BE49-F238E27FC236}">
+                <a16:creationId xmlns:a16="http://schemas.microsoft.com/office/drawing/2014/main" id="{EB802C71-87A2-2873-FDFE-478C21C8E4F7}"/>
+              </a:ext>
+            </a:extLst>
+          </p:cNvPr>
+          <p:cNvSpPr>
+            <a:spLocks noGrp="1"/>
+          </p:cNvSpPr>
+          <p:nvPr>
+            <p:ph type="title"/>
+          </p:nvPr>
+        </p:nvSpPr>
+        <p:spPr/>
+        <p:txBody>
+          <a:bodyPr/>
+          <a:lstStyle/>
+          <a:p>
+            <a:r>
+              <a:rPr lang="fr-FR" dirty="0"/>
+              <a:t>WDBC</a:t>
+            </a:r>
+          </a:p>
+        </p:txBody>
+      </p:sp>
+      <p:sp>
+        <p:nvSpPr>
+          <p:cNvPr id="3" name="Espace réservé du contenu 2">
+            <a:extLst>
+              <a:ext uri="{FF2B5EF4-FFF2-40B4-BE49-F238E27FC236}">
+                <a16:creationId xmlns:a16="http://schemas.microsoft.com/office/drawing/2014/main" id="{920E4074-A874-A047-8296-ABAC0B850E08}"/>
+              </a:ext>
+            </a:extLst>
+          </p:cNvPr>
+          <p:cNvSpPr>
+            <a:spLocks noGrp="1"/>
+          </p:cNvSpPr>
+          <p:nvPr>
+            <p:ph idx="1"/>
+          </p:nvPr>
+        </p:nvSpPr>
+        <p:spPr/>
+        <p:txBody>
+          <a:bodyPr/>
+          <a:lstStyle/>
+          <a:p>
+            <a:r>
+              <a:rPr lang="en-US" dirty="0"/>
+              <a:t>Breast Cancer Wisconsin (Diagnostic) Data Set</a:t>
+            </a:r>
+          </a:p>
+          <a:p>
+            <a:r>
+              <a:rPr lang="fr-FR" dirty="0"/>
+              <a:t>Il s'agit d'un </a:t>
+            </a:r>
+            <a:r>
+              <a:rPr lang="fr-FR" dirty="0" err="1"/>
+              <a:t>dataset</a:t>
+            </a:r>
+            <a:r>
+              <a:rPr lang="fr-FR" dirty="0"/>
+              <a:t> de 32 </a:t>
+            </a:r>
+            <a:r>
+              <a:rPr lang="fr-FR" dirty="0" err="1"/>
+              <a:t>features</a:t>
+            </a:r>
+            <a:r>
+              <a:rPr lang="fr-FR" dirty="0"/>
+              <a:t> sur 569 data</a:t>
+            </a:r>
+          </a:p>
+          <a:p>
+            <a:pPr lvl="1"/>
+            <a:r>
+              <a:rPr lang="fr-FR" dirty="0"/>
+              <a:t>diagnostic représente le diagnostique 1 = malade</a:t>
+            </a:r>
+          </a:p>
+          <a:p>
+            <a:r>
+              <a:rPr lang="fr-FR" dirty="0"/>
+              <a:t>Etude des poids</a:t>
+            </a:r>
+          </a:p>
+          <a:p>
+            <a:pPr lvl="1"/>
+            <a:r>
+              <a:rPr lang="fr-FR" dirty="0"/>
+              <a:t>x = 30 </a:t>
+            </a:r>
+            <a:r>
+              <a:rPr lang="fr-FR" dirty="0" err="1"/>
+              <a:t>features</a:t>
+            </a:r>
+            <a:r>
+              <a:rPr lang="fr-FR" dirty="0"/>
+              <a:t> (tout sauf id et diagnostic)</a:t>
+            </a:r>
+          </a:p>
+          <a:p>
+            <a:pPr lvl="1"/>
+            <a:r>
+              <a:rPr lang="fr-FR" dirty="0" err="1"/>
+              <a:t>xtrain</a:t>
+            </a:r>
+            <a:r>
+              <a:rPr lang="fr-FR" dirty="0"/>
+              <a:t> = 569*0.8*30 = 13656 data =&gt; 55Ko en 32 bits</a:t>
+            </a:r>
+          </a:p>
+          <a:p>
+            <a:endParaRPr lang="fr-FR" dirty="0"/>
+          </a:p>
+        </p:txBody>
+      </p:sp>
+      <p:pic>
+        <p:nvPicPr>
+          <p:cNvPr id="2050" name="Picture 2">
+            <a:extLst>
+              <a:ext uri="{FF2B5EF4-FFF2-40B4-BE49-F238E27FC236}">
+                <a16:creationId xmlns:a16="http://schemas.microsoft.com/office/drawing/2014/main" id="{3F40DD5B-9A4F-D948-3C83-5A95BB662C61}"/>
+              </a:ext>
+            </a:extLst>
+          </p:cNvPr>
+          <p:cNvPicPr>
+            <a:picLocks noChangeAspect="1" noChangeArrowheads="1"/>
+          </p:cNvPicPr>
+          <p:nvPr/>
+        </p:nvPicPr>
+        <p:blipFill>
+          <a:blip r:embed="rId2">
+            <a:extLst>
+              <a:ext uri="{28A0092B-C50C-407E-A947-70E740481C1C}">
+                <a14:useLocalDpi xmlns:a14="http://schemas.microsoft.com/office/drawing/2010/main" val="0"/>
+              </a:ext>
+            </a:extLst>
+          </a:blip>
+          <a:srcRect/>
+          <a:stretch>
+            <a:fillRect/>
+          </a:stretch>
+        </p:blipFill>
+        <p:spPr bwMode="auto">
+          <a:xfrm>
+            <a:off x="108167" y="4953000"/>
+            <a:ext cx="9048750" cy="1905000"/>
+          </a:xfrm>
+          <a:prstGeom prst="rect">
+            <a:avLst/>
+          </a:prstGeom>
+          <a:noFill/>
+          <a:extLst>
+            <a:ext uri="{909E8E84-426E-40DD-AFC4-6F175D3DCCD1}">
+              <a14:hiddenFill xmlns:a14="http://schemas.microsoft.com/office/drawing/2010/main">
+                <a:solidFill>
+                  <a:srgbClr val="FFFFFF"/>
+                </a:solidFill>
+              </a14:hiddenFill>
+            </a:ext>
+          </a:extLst>
+        </p:spPr>
+      </p:pic>
+    </p:spTree>
+    <p:extLst>
+      <p:ext uri="{BB962C8B-B14F-4D97-AF65-F5344CB8AC3E}">
+        <p14:creationId xmlns:p14="http://schemas.microsoft.com/office/powerpoint/2010/main" val="566612603"/>
+      </p:ext>
+    </p:extLst>
+  </p:cSld>
+  <p:clrMapOvr>
+    <a:masterClrMapping/>
+  </p:clrMapOvr>
 </p:sld>
 </file>
 
@@ -4725,13 +6875,6 @@
   <p:clrMapOvr>
     <a:masterClrMapping/>
   </p:clrMapOvr>
-  <p:timing>
-    <p:tnLst>
-      <p:par>
-        <p:cTn id="1" dur="indefinite" restart="never" nodeType="tmRoot"/>
-      </p:par>
-    </p:tnLst>
-  </p:timing>
 </p:sld>
 </file>
 
@@ -4862,13 +7005,6 @@
   <p:clrMapOvr>
     <a:masterClrMapping/>
   </p:clrMapOvr>
-  <p:timing>
-    <p:tnLst>
-      <p:par>
-        <p:cTn id="1" dur="indefinite" restart="never" nodeType="tmRoot"/>
-      </p:par>
-    </p:tnLst>
-  </p:timing>
 </p:sld>
 </file>
 
@@ -5048,13 +7184,6 @@
   <p:clrMapOvr>
     <a:masterClrMapping/>
   </p:clrMapOvr>
-  <p:timing>
-    <p:tnLst>
-      <p:par>
-        <p:cTn id="1" dur="indefinite" restart="never" nodeType="tmRoot"/>
-      </p:par>
-    </p:tnLst>
-  </p:timing>
 </p:sld>
 </file>
 
@@ -5282,13 +7411,6 @@
   <p:clrMapOvr>
     <a:masterClrMapping/>
   </p:clrMapOvr>
-  <p:timing>
-    <p:tnLst>
-      <p:par>
-        <p:cTn id="1" dur="indefinite" restart="never" nodeType="tmRoot"/>
-      </p:par>
-    </p:tnLst>
-  </p:timing>
 </p:sld>
 </file>
 
@@ -5404,13 +7526,6 @@
   <p:clrMapOvr>
     <a:masterClrMapping/>
   </p:clrMapOvr>
-  <p:timing>
-    <p:tnLst>
-      <p:par>
-        <p:cTn id="1" dur="indefinite" restart="never" nodeType="tmRoot"/>
-      </p:par>
-    </p:tnLst>
-  </p:timing>
 </p:sld>
 </file>
 
@@ -5600,13 +7715,6 @@
   <p:clrMapOvr>
     <a:masterClrMapping/>
   </p:clrMapOvr>
-  <p:timing>
-    <p:tnLst>
-      <p:par>
-        <p:cTn id="1" dur="indefinite" restart="never" nodeType="tmRoot"/>
-      </p:par>
-    </p:tnLst>
-  </p:timing>
 </p:sld>
 </file>
 
@@ -5770,13 +7878,6 @@
   <p:clrMapOvr>
     <a:masterClrMapping/>
   </p:clrMapOvr>
-  <p:timing>
-    <p:tnLst>
-      <p:par>
-        <p:cTn id="1" dur="indefinite" restart="never" nodeType="tmRoot"/>
-      </p:par>
-    </p:tnLst>
-  </p:timing>
 </p:sld>
 </file>
 

--- a/PPT/MachineLearning14-KNN.pptx
+++ b/PPT/MachineLearning14-KNN.pptx
@@ -4902,14 +4902,14 @@
           <a:p>
             <a:r>
               <a:rPr lang="fr-FR" dirty="0"/>
-              <a:t>pour mesurer des distances euclidiennes il faut comparer ce qui est comparable</a:t>
+              <a:t>Pour mesurer des distances euclidiennes il faut comparer ce qui est comparable</a:t>
             </a:r>
           </a:p>
           <a:p>
             <a:pPr lvl="1"/>
             <a:r>
               <a:rPr lang="fr-FR" dirty="0"/>
-              <a:t>Tout doit être sur le même facture d'échelle</a:t>
+              <a:t>Tout doit être sur le même facteur d'échelle</a:t>
             </a:r>
           </a:p>
           <a:p>
@@ -4981,7 +4981,23 @@
             </a:r>
             <a:r>
               <a:rPr lang="en-US" dirty="0"/>
-              <a:t> avec un scaler, la prediction doit utilizer des données </a:t>
+              <a:t> avec un scaler, la </a:t>
+            </a:r>
+            <a:r>
+              <a:rPr lang="en-US" dirty="0" err="1"/>
+              <a:t>prédiction</a:t>
+            </a:r>
+            <a:r>
+              <a:rPr lang="en-US" dirty="0"/>
+              <a:t> doit </a:t>
+            </a:r>
+            <a:r>
+              <a:rPr lang="en-US" dirty="0" err="1"/>
+              <a:t>utiliser</a:t>
+            </a:r>
+            <a:r>
+              <a:rPr lang="en-US" dirty="0"/>
+              <a:t> des données </a:t>
             </a:r>
             <a:r>
               <a:rPr lang="en-US" dirty="0" err="1"/>
